--- a/curriculum/M02/W07/L02/slides.pptx
+++ b/curriculum/M02/W07/L02/slides.pptx
@@ -8661,7 +8661,7 @@
               </a:spcAft>
             </a:pPr>
             <a:r>
-              <a:rPr sz="1800" b="1" i="0">
+              <a:rPr sz="1400" b="1" i="0">
                 <a:solidFill>
                   <a:srgbClr val="F2B705"/>
                 </a:solidFill>
@@ -8672,7 +8672,7 @@
               <a:t>•  </a:t>
             </a:r>
             <a:r>
-              <a:rPr sz="1800" b="0" i="0">
+              <a:rPr sz="1400" b="0" i="0">
                 <a:solidFill>
                   <a:srgbClr val="11202B"/>
                 </a:solidFill>
@@ -8683,7 +8683,7 @@
               <a:t>Malonyl-CoA가 만들어지면 나머지 과정은 하나의 효소가 처리한다. 사람의 </a:t>
             </a:r>
             <a:r>
-              <a:rPr sz="1800" b="1" i="0">
+              <a:rPr sz="1400" b="1" i="0">
                 <a:solidFill>
                   <a:srgbClr val="11202B"/>
                 </a:solidFill>
@@ -8694,7 +8694,7 @@
               <a:t>fatty acid synthase(FAS)</a:t>
             </a:r>
             <a:r>
-              <a:rPr sz="1800" b="0" i="0">
+              <a:rPr sz="1400" b="0" i="0">
                 <a:solidFill>
                   <a:srgbClr val="11202B"/>
                 </a:solidFill>
@@ -8705,7 +8705,7 @@
               <a:t>는 두 개의 동일한 폴리펩티드가 결합한 homodimer이며, </a:t>
             </a:r>
             <a:r>
-              <a:rPr sz="1800" b="1" i="0">
+              <a:rPr sz="1400" b="1" i="0">
                 <a:solidFill>
                   <a:srgbClr val="11202B"/>
                 </a:solidFill>
@@ -8716,7 +8716,7 @@
               <a:t>한 폴리펩티드 안에 일곱 가지 촉매 활성과 acyl carrier protein(ACP) 영역이 모두 들어 있다.</a:t>
             </a:r>
             <a:r>
-              <a:rPr sz="1800" b="0" i="0">
+              <a:rPr sz="1400" b="0" i="0">
                 <a:solidFill>
                   <a:srgbClr val="11202B"/>
                 </a:solidFill>
@@ -8734,7 +8734,7 @@
               </a:spcAft>
             </a:pPr>
             <a:r>
-              <a:rPr sz="1800" b="1" i="0">
+              <a:rPr sz="1400" b="1" i="0">
                 <a:solidFill>
                   <a:srgbClr val="F2B705"/>
                 </a:solidFill>
@@ -8745,7 +8745,7 @@
               <a:t>•  </a:t>
             </a:r>
             <a:r>
-              <a:rPr sz="1800" b="0" i="0">
+              <a:rPr sz="1400" b="0" i="0">
                 <a:solidFill>
                   <a:srgbClr val="11202B"/>
                 </a:solidFill>
@@ -8756,7 +8756,7 @@
               <a:t>ACP에는 </a:t>
             </a:r>
             <a:r>
-              <a:rPr sz="1800" b="1" i="0">
+              <a:rPr sz="1400" b="1" i="0">
                 <a:solidFill>
                   <a:srgbClr val="11202B"/>
                 </a:solidFill>
@@ -8767,7 +8767,7 @@
               <a:t>phosphopantetheine</a:t>
             </a:r>
             <a:r>
-              <a:rPr sz="1800" b="0" i="0">
+              <a:rPr sz="1400" b="0" i="0">
                 <a:solidFill>
                   <a:srgbClr val="11202B"/>
                 </a:solidFill>
@@ -8778,7 +8778,7 @@
               <a:t> 팔이 붙어 있고, 이 팔의 -SH에 자라나는 사슬이 thioester로 매달려 활성 부위 사이를 옮겨 다닌다. Phosphopantetheine은 </a:t>
             </a:r>
             <a:r>
-              <a:rPr sz="1800" b="1" i="0">
+              <a:rPr sz="1400" b="1" i="0">
                 <a:solidFill>
                   <a:srgbClr val="11202B"/>
                 </a:solidFill>
@@ -8789,7 +8789,7 @@
               <a:t>pantothenic acid(vitamin B₅)</a:t>
             </a:r>
             <a:r>
-              <a:rPr sz="1800" b="0" i="0">
+              <a:rPr sz="1400" b="0" i="0">
                 <a:solidFill>
                   <a:srgbClr val="11202B"/>
                 </a:solidFill>
@@ -8807,7 +8807,7 @@
               </a:spcAft>
             </a:pPr>
             <a:r>
-              <a:rPr sz="1800" b="1" i="0">
+              <a:rPr sz="1400" b="1" i="0">
                 <a:solidFill>
                   <a:srgbClr val="F2B705"/>
                 </a:solidFill>
@@ -8818,7 +8818,7 @@
               <a:t>•  </a:t>
             </a:r>
             <a:r>
-              <a:rPr sz="1800" b="0" i="0">
+              <a:rPr sz="1400" b="0" i="0">
                 <a:solidFill>
                   <a:srgbClr val="11202B"/>
                 </a:solidFill>
@@ -8827,6 +8827,203 @@
                 <a:cs typeface="Malgun Gothic"/>
               </a:rPr>
               <a:t>반응은 네 단계가 한 순환을 이룬다.</a:t>
+            </a:r>
+          </a:p>
+          <a:p>
+            <a:pPr>
+              <a:spcAft>
+                <a:spcPts val="900"/>
+              </a:spcAft>
+            </a:pPr>
+            <a:r>
+              <a:rPr sz="1400" b="1" i="0">
+                <a:solidFill>
+                  <a:srgbClr val="F2B705"/>
+                </a:solidFill>
+                <a:latin typeface="Malgun Gothic"/>
+                <a:ea typeface="Malgun Gothic"/>
+                <a:cs typeface="Malgun Gothic"/>
+              </a:rPr>
+              <a:t>•  </a:t>
+            </a:r>
+            <a:r>
+              <a:rPr sz="1400" b="0" i="0">
+                <a:solidFill>
+                  <a:srgbClr val="11202B"/>
+                </a:solidFill>
+                <a:latin typeface="Malgun Gothic"/>
+                <a:ea typeface="Malgun Gothic"/>
+                <a:cs typeface="Malgun Gothic"/>
+              </a:rPr>
+              <a:t>1. </a:t>
+            </a:r>
+            <a:r>
+              <a:rPr sz="1400" b="1" i="0">
+                <a:solidFill>
+                  <a:srgbClr val="11202B"/>
+                </a:solidFill>
+                <a:latin typeface="Malgun Gothic"/>
+                <a:ea typeface="Malgun Gothic"/>
+                <a:cs typeface="Malgun Gothic"/>
+              </a:rPr>
+              <a:t>Condensation(축합)</a:t>
+            </a:r>
+            <a:r>
+              <a:rPr sz="1400" b="0" i="0">
+                <a:solidFill>
+                  <a:srgbClr val="11202B"/>
+                </a:solidFill>
+                <a:latin typeface="Malgun Gothic"/>
+                <a:ea typeface="Malgun Gothic"/>
+                <a:cs typeface="Malgun Gothic"/>
+              </a:rPr>
+              <a:t>: 활성 부위의 acetyl기가 malonyl-ACP의 C2에 결합해 acetoacetyl-ACP가 되고 </a:t>
+            </a:r>
+            <a:r>
+              <a:rPr sz="1400" b="1" i="0">
+                <a:solidFill>
+                  <a:srgbClr val="11202B"/>
+                </a:solidFill>
+                <a:latin typeface="Malgun Gothic"/>
+                <a:ea typeface="Malgun Gothic"/>
+                <a:cs typeface="Malgun Gothic"/>
+              </a:rPr>
+              <a:t>CO₂가 떨어져 나간다.</a:t>
+            </a:r>
+            <a:r>
+              <a:rPr sz="1400" b="0" i="0">
+                <a:solidFill>
+                  <a:srgbClr val="11202B"/>
+                </a:solidFill>
+                <a:latin typeface="Malgun Gothic"/>
+                <a:ea typeface="Malgun Gothic"/>
+                <a:cs typeface="Malgun Gothic"/>
+              </a:rPr>
+              <a:t> 떨어져 나가는 CO₂는 ACC가 붙인 바로 그 CO₂다. 이 방출이 반응의 추진력이며, 탄소를 늘리지 않으면서 결합 형성을 열역학적으로 가능하게 만든다.</a:t>
+            </a:r>
+          </a:p>
+          <a:p>
+            <a:pPr>
+              <a:spcAft>
+                <a:spcPts val="900"/>
+              </a:spcAft>
+            </a:pPr>
+            <a:r>
+              <a:rPr sz="1400" b="1" i="0">
+                <a:solidFill>
+                  <a:srgbClr val="F2B705"/>
+                </a:solidFill>
+                <a:latin typeface="Malgun Gothic"/>
+                <a:ea typeface="Malgun Gothic"/>
+                <a:cs typeface="Malgun Gothic"/>
+              </a:rPr>
+              <a:t>•  </a:t>
+            </a:r>
+            <a:r>
+              <a:rPr sz="1400" b="0" i="0">
+                <a:solidFill>
+                  <a:srgbClr val="11202B"/>
+                </a:solidFill>
+                <a:latin typeface="Malgun Gothic"/>
+                <a:ea typeface="Malgun Gothic"/>
+                <a:cs typeface="Malgun Gothic"/>
+              </a:rPr>
+              <a:t>2. </a:t>
+            </a:r>
+            <a:r>
+              <a:rPr sz="1400" b="1" i="0">
+                <a:solidFill>
+                  <a:srgbClr val="11202B"/>
+                </a:solidFill>
+                <a:latin typeface="Malgun Gothic"/>
+                <a:ea typeface="Malgun Gothic"/>
+                <a:cs typeface="Malgun Gothic"/>
+              </a:rPr>
+              <a:t>Reduction(환원)</a:t>
+            </a:r>
+            <a:r>
+              <a:rPr sz="1400" b="0" i="0">
+                <a:solidFill>
+                  <a:srgbClr val="11202B"/>
+                </a:solidFill>
+                <a:latin typeface="Malgun Gothic"/>
+                <a:ea typeface="Malgun Gothic"/>
+                <a:cs typeface="Malgun Gothic"/>
+              </a:rPr>
+              <a:t>: NADPH가 keto기를 환원해 </a:t>
+            </a:r>
+            <a:r>
+              <a:rPr sz="1400" b="1" i="0">
+                <a:solidFill>
+                  <a:srgbClr val="11202B"/>
+                </a:solidFill>
+                <a:latin typeface="Malgun Gothic"/>
+                <a:ea typeface="Malgun Gothic"/>
+                <a:cs typeface="Malgun Gothic"/>
+              </a:rPr>
+              <a:t>D-3-hydroxybutyryl-ACP</a:t>
+            </a:r>
+            <a:r>
+              <a:rPr sz="1400" b="0" i="0">
+                <a:solidFill>
+                  <a:srgbClr val="11202B"/>
+                </a:solidFill>
+                <a:latin typeface="Malgun Gothic"/>
+                <a:ea typeface="Malgun Gothic"/>
+                <a:cs typeface="Malgun Gothic"/>
+              </a:rPr>
+              <a:t>를 만든다. 입체 구조가 D형인 점이 산화 경로의 L형 중간체와 다르다.</a:t>
+            </a:r>
+          </a:p>
+          <a:p>
+            <a:pPr>
+              <a:spcAft>
+                <a:spcPts val="900"/>
+              </a:spcAft>
+            </a:pPr>
+            <a:r>
+              <a:rPr sz="1400" b="1" i="0">
+                <a:solidFill>
+                  <a:srgbClr val="F2B705"/>
+                </a:solidFill>
+                <a:latin typeface="Malgun Gothic"/>
+                <a:ea typeface="Malgun Gothic"/>
+                <a:cs typeface="Malgun Gothic"/>
+              </a:rPr>
+              <a:t>•  </a:t>
+            </a:r>
+            <a:r>
+              <a:rPr sz="1400" b="0" i="0">
+                <a:solidFill>
+                  <a:srgbClr val="11202B"/>
+                </a:solidFill>
+                <a:latin typeface="Malgun Gothic"/>
+                <a:ea typeface="Malgun Gothic"/>
+                <a:cs typeface="Malgun Gothic"/>
+              </a:rPr>
+              <a:t>3. </a:t>
+            </a:r>
+            <a:r>
+              <a:rPr sz="1400" b="1" i="0">
+                <a:solidFill>
+                  <a:srgbClr val="11202B"/>
+                </a:solidFill>
+                <a:latin typeface="Malgun Gothic"/>
+                <a:ea typeface="Malgun Gothic"/>
+                <a:cs typeface="Malgun Gothic"/>
+              </a:rPr>
+              <a:t>Dehydration(탈수)</a:t>
+            </a:r>
+            <a:r>
+              <a:rPr sz="1400" b="0" i="0">
+                <a:solidFill>
+                  <a:srgbClr val="11202B"/>
+                </a:solidFill>
+                <a:latin typeface="Malgun Gothic"/>
+                <a:ea typeface="Malgun Gothic"/>
+                <a:cs typeface="Malgun Gothic"/>
+              </a:rPr>
+              <a:t>: 물이 빠지면서 trans 이중결합이 생겨 crotonyl-ACP가 된다.</a:t>
             </a:r>
           </a:p>
         </p:txBody>
@@ -9103,7 +9300,7 @@
               </a:spcAft>
             </a:pPr>
             <a:r>
-              <a:rPr sz="1800" b="1" i="0">
+              <a:rPr sz="2000" b="1" i="0">
                 <a:solidFill>
                   <a:srgbClr val="F2B705"/>
                 </a:solidFill>
@@ -9114,62 +9311,18 @@
               <a:t>•  </a:t>
             </a:r>
             <a:r>
-              <a:rPr sz="1800" b="0" i="0">
-                <a:solidFill>
-                  <a:srgbClr val="11202B"/>
-                </a:solidFill>
-                <a:latin typeface="Malgun Gothic"/>
-                <a:ea typeface="Malgun Gothic"/>
-                <a:cs typeface="Malgun Gothic"/>
-              </a:rPr>
-              <a:t>1. </a:t>
-            </a:r>
-            <a:r>
-              <a:rPr sz="1800" b="1" i="0">
-                <a:solidFill>
-                  <a:srgbClr val="11202B"/>
-                </a:solidFill>
-                <a:latin typeface="Malgun Gothic"/>
-                <a:ea typeface="Malgun Gothic"/>
-                <a:cs typeface="Malgun Gothic"/>
-              </a:rPr>
-              <a:t>Condensation(축합)</a:t>
-            </a:r>
-            <a:r>
-              <a:rPr sz="1800" b="0" i="0">
-                <a:solidFill>
-                  <a:srgbClr val="11202B"/>
-                </a:solidFill>
-                <a:latin typeface="Malgun Gothic"/>
-                <a:ea typeface="Malgun Gothic"/>
-                <a:cs typeface="Malgun Gothic"/>
-              </a:rPr>
-              <a:t>: 활성 부위의 acetyl기가 malonyl-ACP의 C2에 결합해 acetoacetyl-ACP가 되고 </a:t>
-            </a:r>
-            <a:r>
-              <a:rPr sz="1800" b="1" i="0">
-                <a:solidFill>
-                  <a:srgbClr val="11202B"/>
-                </a:solidFill>
-                <a:latin typeface="Malgun Gothic"/>
-                <a:ea typeface="Malgun Gothic"/>
-                <a:cs typeface="Malgun Gothic"/>
-              </a:rPr>
-              <a:t>CO₂가 떨어져 나간다.</a:t>
-            </a:r>
-            <a:r>
-              <a:rPr sz="1800" b="0" i="0">
-                <a:solidFill>
-                  <a:srgbClr val="11202B"/>
-                </a:solidFill>
-                <a:latin typeface="Malgun Gothic"/>
-                <a:ea typeface="Malgun Gothic"/>
-                <a:cs typeface="Malgun Gothic"/>
-              </a:rPr>
-              <a:t> 떨어져 나가는 CO₂는 ACC가 붙인 바로 그 CO₂다. 이 방출이 반응의 추진력이며, 탄소를 늘리지 않으면서 결합 형성을 열역학적으로 가능하게 만든다. 2. </a:t>
-            </a:r>
-            <a:r>
-              <a:rPr sz="1800" b="1" i="0">
+              <a:rPr sz="2000" b="0" i="0">
+                <a:solidFill>
+                  <a:srgbClr val="11202B"/>
+                </a:solidFill>
+                <a:latin typeface="Malgun Gothic"/>
+                <a:ea typeface="Malgun Gothic"/>
+                <a:cs typeface="Malgun Gothic"/>
+              </a:rPr>
+              <a:t>4. </a:t>
+            </a:r>
+            <a:r>
+              <a:rPr sz="2000" b="1" i="0">
                 <a:solidFill>
                   <a:srgbClr val="11202B"/>
                 </a:solidFill>
@@ -9180,73 +9333,7 @@
               <a:t>Reduction(환원)</a:t>
             </a:r>
             <a:r>
-              <a:rPr sz="1800" b="0" i="0">
-                <a:solidFill>
-                  <a:srgbClr val="11202B"/>
-                </a:solidFill>
-                <a:latin typeface="Malgun Gothic"/>
-                <a:ea typeface="Malgun Gothic"/>
-                <a:cs typeface="Malgun Gothic"/>
-              </a:rPr>
-              <a:t>: NADPH가 keto기를 환원해 </a:t>
-            </a:r>
-            <a:r>
-              <a:rPr sz="1800" b="1" i="0">
-                <a:solidFill>
-                  <a:srgbClr val="11202B"/>
-                </a:solidFill>
-                <a:latin typeface="Malgun Gothic"/>
-                <a:ea typeface="Malgun Gothic"/>
-                <a:cs typeface="Malgun Gothic"/>
-              </a:rPr>
-              <a:t>D-3-hydroxybutyryl-ACP</a:t>
-            </a:r>
-            <a:r>
-              <a:rPr sz="1800" b="0" i="0">
-                <a:solidFill>
-                  <a:srgbClr val="11202B"/>
-                </a:solidFill>
-                <a:latin typeface="Malgun Gothic"/>
-                <a:ea typeface="Malgun Gothic"/>
-                <a:cs typeface="Malgun Gothic"/>
-              </a:rPr>
-              <a:t>를 만든다. 입체 구조가 D형인 점이 산화 경로의 L형 중간체와 다르다. 3. </a:t>
-            </a:r>
-            <a:r>
-              <a:rPr sz="1800" b="1" i="0">
-                <a:solidFill>
-                  <a:srgbClr val="11202B"/>
-                </a:solidFill>
-                <a:latin typeface="Malgun Gothic"/>
-                <a:ea typeface="Malgun Gothic"/>
-                <a:cs typeface="Malgun Gothic"/>
-              </a:rPr>
-              <a:t>Dehydration(탈수)</a:t>
-            </a:r>
-            <a:r>
-              <a:rPr sz="1800" b="0" i="0">
-                <a:solidFill>
-                  <a:srgbClr val="11202B"/>
-                </a:solidFill>
-                <a:latin typeface="Malgun Gothic"/>
-                <a:ea typeface="Malgun Gothic"/>
-                <a:cs typeface="Malgun Gothic"/>
-              </a:rPr>
-              <a:t>: 물이 빠지면서 trans 이중결합이 생겨 crotonyl-ACP가 된다. 4. </a:t>
-            </a:r>
-            <a:r>
-              <a:rPr sz="1800" b="1" i="0">
-                <a:solidFill>
-                  <a:srgbClr val="11202B"/>
-                </a:solidFill>
-                <a:latin typeface="Malgun Gothic"/>
-                <a:ea typeface="Malgun Gothic"/>
-                <a:cs typeface="Malgun Gothic"/>
-              </a:rPr>
-              <a:t>Reduction(환원)</a:t>
-            </a:r>
-            <a:r>
-              <a:rPr sz="1800" b="0" i="0">
+              <a:rPr sz="2000" b="0" i="0">
                 <a:solidFill>
                   <a:srgbClr val="11202B"/>
                 </a:solidFill>
@@ -9257,7 +9344,7 @@
               <a:t>: NADPH가 이중결합을 환원해 </a:t>
             </a:r>
             <a:r>
-              <a:rPr sz="1800" b="1" i="0">
+              <a:rPr sz="2000" b="1" i="0">
                 <a:solidFill>
                   <a:srgbClr val="11202B"/>
                 </a:solidFill>
@@ -9268,7 +9355,7 @@
               <a:t>butyryl-ACP</a:t>
             </a:r>
             <a:r>
-              <a:rPr sz="1800" b="0" i="0">
+              <a:rPr sz="2000" b="0" i="0">
                 <a:solidFill>
                   <a:srgbClr val="11202B"/>
                 </a:solidFill>
@@ -19569,11 +19656,40 @@
                 <a:ea typeface="Malgun Gothic"/>
                 <a:cs typeface="Malgun Gothic"/>
               </a:rPr>
-              <a:t>가 된다(citrate synthase). 2. Citrate가 </a:t>
-            </a:r>
+              <a:t>가 된다(citrate synthase).</a:t>
+            </a:r>
+          </a:p>
+          <a:p>
+            <a:pPr>
+              <a:spcAft>
+                <a:spcPts val="900"/>
+              </a:spcAft>
+            </a:pPr>
             <a:r>
               <a:rPr sz="1600" b="1" i="0">
                 <a:solidFill>
+                  <a:srgbClr val="F2B705"/>
+                </a:solidFill>
+                <a:latin typeface="Malgun Gothic"/>
+                <a:ea typeface="Malgun Gothic"/>
+                <a:cs typeface="Malgun Gothic"/>
+              </a:rPr>
+              <a:t>•  </a:t>
+            </a:r>
+            <a:r>
+              <a:rPr sz="1600" b="0" i="0">
+                <a:solidFill>
+                  <a:srgbClr val="11202B"/>
+                </a:solidFill>
+                <a:latin typeface="Malgun Gothic"/>
+                <a:ea typeface="Malgun Gothic"/>
+                <a:cs typeface="Malgun Gothic"/>
+              </a:rPr>
+              <a:t>2. Citrate가 </a:t>
+            </a:r>
+            <a:r>
+              <a:rPr sz="1600" b="1" i="0">
+                <a:solidFill>
                   <a:srgbClr val="11202B"/>
                 </a:solidFill>
                 <a:latin typeface="Malgun Gothic"/>
@@ -19591,11 +19707,40 @@
                 <a:ea typeface="Malgun Gothic"/>
                 <a:cs typeface="Malgun Gothic"/>
               </a:rPr>
-              <a:t>를 통해 세포질로 나온다. 3. 세포질에서 </a:t>
-            </a:r>
+              <a:t>를 통해 세포질로 나온다.</a:t>
+            </a:r>
+          </a:p>
+          <a:p>
+            <a:pPr>
+              <a:spcAft>
+                <a:spcPts val="900"/>
+              </a:spcAft>
+            </a:pPr>
             <a:r>
               <a:rPr sz="1600" b="1" i="0">
                 <a:solidFill>
+                  <a:srgbClr val="F2B705"/>
+                </a:solidFill>
+                <a:latin typeface="Malgun Gothic"/>
+                <a:ea typeface="Malgun Gothic"/>
+                <a:cs typeface="Malgun Gothic"/>
+              </a:rPr>
+              <a:t>•  </a:t>
+            </a:r>
+            <a:r>
+              <a:rPr sz="1600" b="0" i="0">
+                <a:solidFill>
+                  <a:srgbClr val="11202B"/>
+                </a:solidFill>
+                <a:latin typeface="Malgun Gothic"/>
+                <a:ea typeface="Malgun Gothic"/>
+                <a:cs typeface="Malgun Gothic"/>
+              </a:rPr>
+              <a:t>3. 세포질에서 </a:t>
+            </a:r>
+            <a:r>
+              <a:rPr sz="1600" b="1" i="0">
+                <a:solidFill>
                   <a:srgbClr val="11202B"/>
                 </a:solidFill>
                 <a:latin typeface="Malgun Gothic"/>
@@ -19613,7 +19758,36 @@
                 <a:ea typeface="Malgun Gothic"/>
                 <a:cs typeface="Malgun Gothic"/>
               </a:rPr>
-              <a:t>가 ATP를 써서 citrate를 다시 acetyl-CoA와 oxaloacetate로 가른다. 4. 남은 oxaloacetate는 </a:t>
+              <a:t>가 ATP를 써서 citrate를 다시 acetyl-CoA와 oxaloacetate로 가른다.</a:t>
+            </a:r>
+          </a:p>
+          <a:p>
+            <a:pPr>
+              <a:spcAft>
+                <a:spcPts val="900"/>
+              </a:spcAft>
+            </a:pPr>
+            <a:r>
+              <a:rPr sz="1600" b="1" i="0">
+                <a:solidFill>
+                  <a:srgbClr val="F2B705"/>
+                </a:solidFill>
+                <a:latin typeface="Malgun Gothic"/>
+                <a:ea typeface="Malgun Gothic"/>
+                <a:cs typeface="Malgun Gothic"/>
+              </a:rPr>
+              <a:t>•  </a:t>
+            </a:r>
+            <a:r>
+              <a:rPr sz="1600" b="0" i="0">
+                <a:solidFill>
+                  <a:srgbClr val="11202B"/>
+                </a:solidFill>
+                <a:latin typeface="Malgun Gothic"/>
+                <a:ea typeface="Malgun Gothic"/>
+                <a:cs typeface="Malgun Gothic"/>
+              </a:rPr>
+              <a:t>4. 남은 oxaloacetate는 </a:t>
             </a:r>
             <a:r>
               <a:rPr sz="1600" b="1" i="0">
